--- a/sample/graph4.pptx
+++ b/sample/graph4.pptx
@@ -120,7 +120,7 @@
               </a:lnSpc>
             </a:pPr>
             <a:r>
-              <a:rPr lang="ja-JP" altLang="en-US" sz="800">
+              <a:rPr lang="ja-JP" altLang="en-US" sz="750">
                 <a:solidFill>
                   <a:srgbClr val="333333"/>
                 </a:solidFill>
@@ -167,7 +167,7 @@
               </a:lnSpc>
             </a:pPr>
             <a:r>
-              <a:rPr lang="ja-JP" altLang="en-US" sz="800">
+              <a:rPr lang="ja-JP" altLang="en-US" sz="750">
                 <a:solidFill>
                   <a:srgbClr val="333333"/>
                 </a:solidFill>
@@ -212,7 +212,7 @@
               </a:lnSpc>
             </a:pPr>
             <a:r>
-              <a:rPr lang="ja-JP" altLang="en-US" sz="800">
+              <a:rPr lang="ja-JP" altLang="en-US" sz="750">
                 <a:solidFill>
                   <a:srgbClr val="1A1A1A"/>
                 </a:solidFill>
@@ -257,7 +257,7 @@
               </a:lnSpc>
             </a:pPr>
             <a:r>
-              <a:rPr lang="ja-JP" altLang="en-US" sz="800">
+              <a:rPr lang="ja-JP" altLang="en-US" sz="750">
                 <a:solidFill>
                   <a:srgbClr val="333333"/>
                 </a:solidFill>
@@ -302,7 +302,7 @@
               </a:lnSpc>
             </a:pPr>
             <a:r>
-              <a:rPr lang="ja-JP" altLang="en-US" sz="800">
+              <a:rPr lang="ja-JP" altLang="en-US" sz="750">
                 <a:solidFill>
                   <a:srgbClr val="5A4500"/>
                 </a:solidFill>
@@ -347,7 +347,7 @@
               </a:lnSpc>
             </a:pPr>
             <a:r>
-              <a:rPr lang="ja-JP" altLang="en-US" sz="800">
+              <a:rPr lang="ja-JP" altLang="en-US" sz="750">
                 <a:solidFill>
                   <a:srgbClr val="333333"/>
                 </a:solidFill>
@@ -394,7 +394,7 @@
               </a:lnSpc>
             </a:pPr>
             <a:r>
-              <a:rPr lang="ja-JP" altLang="en-US" sz="800">
+              <a:rPr lang="ja-JP" altLang="en-US" sz="750">
                 <a:solidFill>
                   <a:srgbClr val="333333"/>
                 </a:solidFill>
@@ -439,7 +439,7 @@
               </a:lnSpc>
             </a:pPr>
             <a:r>
-              <a:rPr lang="ja-JP" altLang="en-US" sz="800">
+              <a:rPr lang="ja-JP" altLang="en-US" sz="750">
                 <a:solidFill>
                   <a:srgbClr val="333333"/>
                 </a:solidFill>
@@ -656,8 +656,8 @@
         </p:nvSpPr>
         <p:spPr>
           <a:xfrm>
-            <a:off x="5656229" y="1523627"/>
-            <a:ext cx="247090" cy="172963"/>
+            <a:off x="5635925" y="1523627"/>
+            <a:ext cx="287697" cy="172963"/>
           </a:xfrm>
           <a:prstGeom prst="roundRect">
             <a:avLst/>
@@ -672,16 +672,16 @@
           </a:ln>
         </p:spPr>
         <p:txBody>
-          <a:bodyPr rtlCol="0" anchor="ctr" lIns="18288" tIns="9144" rIns="18288" bIns="9144"/>
-          <a:lstStyle/>
-          <a:p>
-            <a:pPr algn="ctr">
-              <a:lnSpc>
-                <a:spcPct val="150000"/>
-              </a:lnSpc>
-            </a:pPr>
-            <a:r>
-              <a:rPr lang="ja-JP" altLang="en-US" sz="800">
+          <a:bodyPr rtlCol="0" anchor="ctr" wrap="none" lIns="0" tIns="0" rIns="0" bIns="0"/>
+          <a:lstStyle/>
+          <a:p>
+            <a:pPr algn="ctr">
+              <a:lnSpc>
+                <a:spcPct val="150000"/>
+              </a:lnSpc>
+            </a:pPr>
+            <a:r>
+              <a:rPr lang="ja-JP" altLang="en-US" sz="750">
                 <a:solidFill>
                   <a:srgbClr val="333333"/>
                 </a:solidFill>
@@ -701,8 +701,8 @@
         </p:nvSpPr>
         <p:spPr>
           <a:xfrm>
-            <a:off x="5745351" y="1604744"/>
-            <a:ext cx="444762" cy="172963"/>
+            <a:off x="5713187" y="1604744"/>
+            <a:ext cx="509090" cy="172963"/>
           </a:xfrm>
           <a:prstGeom prst="roundRect">
             <a:avLst/>
@@ -717,16 +717,16 @@
           </a:ln>
         </p:spPr>
         <p:txBody>
-          <a:bodyPr rtlCol="0" anchor="ctr" lIns="18288" tIns="9144" rIns="18288" bIns="9144"/>
-          <a:lstStyle/>
-          <a:p>
-            <a:pPr algn="ctr">
-              <a:lnSpc>
-                <a:spcPct val="150000"/>
-              </a:lnSpc>
-            </a:pPr>
-            <a:r>
-              <a:rPr lang="ja-JP" altLang="en-US" sz="800">
+          <a:bodyPr rtlCol="0" anchor="ctr" wrap="none" lIns="0" tIns="0" rIns="0" bIns="0"/>
+          <a:lstStyle/>
+          <a:p>
+            <a:pPr algn="ctr">
+              <a:lnSpc>
+                <a:spcPct val="150000"/>
+              </a:lnSpc>
+            </a:pPr>
+            <a:r>
+              <a:rPr lang="ja-JP" altLang="en-US" sz="750">
                 <a:solidFill>
                   <a:srgbClr val="333333"/>
                 </a:solidFill>
@@ -746,8 +746,8 @@
         </p:nvSpPr>
         <p:spPr>
           <a:xfrm>
-            <a:off x="4316952" y="3888012"/>
-            <a:ext cx="247090" cy="172963"/>
+            <a:off x="4296648" y="3888012"/>
+            <a:ext cx="287697" cy="172963"/>
           </a:xfrm>
           <a:prstGeom prst="roundRect">
             <a:avLst/>
@@ -762,16 +762,16 @@
           </a:ln>
         </p:spPr>
         <p:txBody>
-          <a:bodyPr rtlCol="0" anchor="ctr" lIns="18288" tIns="9144" rIns="18288" bIns="9144"/>
-          <a:lstStyle/>
-          <a:p>
-            <a:pPr algn="ctr">
-              <a:lnSpc>
-                <a:spcPct val="150000"/>
-              </a:lnSpc>
-            </a:pPr>
-            <a:r>
-              <a:rPr lang="ja-JP" altLang="en-US" sz="800">
+          <a:bodyPr rtlCol="0" anchor="ctr" wrap="none" lIns="0" tIns="0" rIns="0" bIns="0"/>
+          <a:lstStyle/>
+          <a:p>
+            <a:pPr algn="ctr">
+              <a:lnSpc>
+                <a:spcPct val="150000"/>
+              </a:lnSpc>
+            </a:pPr>
+            <a:r>
+              <a:rPr lang="ja-JP" altLang="en-US" sz="750">
                 <a:solidFill>
                   <a:srgbClr val="333333"/>
                 </a:solidFill>
@@ -791,8 +791,8 @@
         </p:nvSpPr>
         <p:spPr>
           <a:xfrm>
-            <a:off x="7955353" y="4511914"/>
-            <a:ext cx="444762" cy="172963"/>
+            <a:off x="7923189" y="4511914"/>
+            <a:ext cx="509090" cy="172963"/>
           </a:xfrm>
           <a:prstGeom prst="roundRect">
             <a:avLst/>
@@ -807,16 +807,16 @@
           </a:ln>
         </p:spPr>
         <p:txBody>
-          <a:bodyPr rtlCol="0" anchor="ctr" lIns="18288" tIns="9144" rIns="18288" bIns="9144"/>
-          <a:lstStyle/>
-          <a:p>
-            <a:pPr algn="ctr">
-              <a:lnSpc>
-                <a:spcPct val="150000"/>
-              </a:lnSpc>
-            </a:pPr>
-            <a:r>
-              <a:rPr lang="ja-JP" altLang="en-US" sz="800">
+          <a:bodyPr rtlCol="0" anchor="ctr" wrap="none" lIns="0" tIns="0" rIns="0" bIns="0"/>
+          <a:lstStyle/>
+          <a:p>
+            <a:pPr algn="ctr">
+              <a:lnSpc>
+                <a:spcPct val="150000"/>
+              </a:lnSpc>
+            </a:pPr>
+            <a:r>
+              <a:rPr lang="ja-JP" altLang="en-US" sz="750">
                 <a:solidFill>
                   <a:srgbClr val="333333"/>
                 </a:solidFill>

--- a/sample/graph4.pptx
+++ b/sample/graph4.pptx
@@ -656,8 +656,8 @@
         </p:nvSpPr>
         <p:spPr>
           <a:xfrm>
-            <a:off x="5635925" y="1523627"/>
-            <a:ext cx="287697" cy="172963"/>
+            <a:off x="5635012" y="1514270"/>
+            <a:ext cx="289524" cy="191676"/>
           </a:xfrm>
           <a:prstGeom prst="roundRect">
             <a:avLst/>
@@ -701,8 +701,8 @@
         </p:nvSpPr>
         <p:spPr>
           <a:xfrm>
-            <a:off x="5713187" y="1604744"/>
-            <a:ext cx="509090" cy="172963"/>
+            <a:off x="5712274" y="1595387"/>
+            <a:ext cx="510917" cy="191676"/>
           </a:xfrm>
           <a:prstGeom prst="roundRect">
             <a:avLst/>
@@ -746,8 +746,8 @@
         </p:nvSpPr>
         <p:spPr>
           <a:xfrm>
-            <a:off x="4296648" y="3888012"/>
-            <a:ext cx="287697" cy="172963"/>
+            <a:off x="4295735" y="3878655"/>
+            <a:ext cx="289524" cy="191676"/>
           </a:xfrm>
           <a:prstGeom prst="roundRect">
             <a:avLst/>
@@ -791,8 +791,8 @@
         </p:nvSpPr>
         <p:spPr>
           <a:xfrm>
-            <a:off x="7923189" y="4511914"/>
-            <a:ext cx="509090" cy="172963"/>
+            <a:off x="7922275" y="4502558"/>
+            <a:ext cx="510917" cy="191676"/>
           </a:xfrm>
           <a:prstGeom prst="roundRect">
             <a:avLst/>

--- a/sample/graph4.pptx
+++ b/sample/graph4.pptx
@@ -111,7 +111,7 @@
           </a:ln>
         </p:spPr>
         <p:txBody>
-          <a:bodyPr rtlCol="0" anchor="t" lIns="18288" tIns="9144" rIns="18288" bIns="9144"/>
+          <a:bodyPr rtlCol="0" anchor="t" wrap="none" lIns="18288" tIns="9144" rIns="18288" bIns="9144"/>
           <a:lstStyle/>
           <a:p>
             <a:pPr algn="ctr">
@@ -158,7 +158,7 @@
           </a:ln>
         </p:spPr>
         <p:txBody>
-          <a:bodyPr rtlCol="0" anchor="t" lIns="18288" tIns="9144" rIns="18288" bIns="9144"/>
+          <a:bodyPr rtlCol="0" anchor="t" wrap="none" lIns="18288" tIns="9144" rIns="18288" bIns="9144"/>
           <a:lstStyle/>
           <a:p>
             <a:pPr algn="ctr">
@@ -203,7 +203,7 @@
           </a:ln>
         </p:spPr>
         <p:txBody>
-          <a:bodyPr rtlCol="0" anchor="ctr" lIns="18288" tIns="9144" rIns="18288" bIns="9144"/>
+          <a:bodyPr rtlCol="0" anchor="ctr" wrap="none" lIns="18288" tIns="9144" rIns="18288" bIns="9144"/>
           <a:lstStyle/>
           <a:p>
             <a:pPr algn="ctr">
@@ -219,7 +219,41 @@
                 <a:latin typeface="Noto Sans JP"/>
                 <a:ea typeface="Noto Sans JP"/>
               </a:rPr>
-              <a:t>問い合わせフォーム 氏名やメールアドレスなど送信前に必ず検証する入力項目を含む</a:t>
+              <a:t>問い合わせフォーム 氏名やメール</a:t>
+            </a:r>
+          </a:p>
+          <a:p>
+            <a:pPr algn="ctr">
+              <a:lnSpc>
+                <a:spcPct val="150000"/>
+              </a:lnSpc>
+            </a:pPr>
+            <a:r>
+              <a:rPr lang="ja-JP" altLang="en-US" sz="750">
+                <a:solidFill>
+                  <a:srgbClr val="1A1A1A"/>
+                </a:solidFill>
+                <a:latin typeface="Noto Sans JP"/>
+                <a:ea typeface="Noto Sans JP"/>
+              </a:rPr>
+              <a:t>アドレスなど送信前に必ず検証す</a:t>
+            </a:r>
+          </a:p>
+          <a:p>
+            <a:pPr algn="ctr">
+              <a:lnSpc>
+                <a:spcPct val="150000"/>
+              </a:lnSpc>
+            </a:pPr>
+            <a:r>
+              <a:rPr lang="ja-JP" altLang="en-US" sz="750">
+                <a:solidFill>
+                  <a:srgbClr val="1A1A1A"/>
+                </a:solidFill>
+                <a:latin typeface="Noto Sans JP"/>
+                <a:ea typeface="Noto Sans JP"/>
+              </a:rPr>
+              <a:t>る入力項目を含む</a:t>
             </a:r>
           </a:p>
         </p:txBody>
@@ -248,23 +282,57 @@
           </a:ln>
         </p:spPr>
         <p:txBody>
-          <a:bodyPr rtlCol="0" anchor="ctr" lIns="18288" tIns="9144" rIns="18288" bIns="9144"/>
-          <a:lstStyle/>
-          <a:p>
-            <a:pPr algn="ctr">
-              <a:lnSpc>
-                <a:spcPct val="150000"/>
-              </a:lnSpc>
-            </a:pPr>
-            <a:r>
-              <a:rPr lang="ja-JP" altLang="en-US" sz="750">
-                <a:solidFill>
-                  <a:srgbClr val="333333"/>
-                </a:solidFill>
-                <a:latin typeface="Noto Sans JP"/>
-                <a:ea typeface="Noto Sans JP"/>
-              </a:rPr>
-              <a:t>下書き保存 ブラウザのローカルストレージに一時保存し再読み込み時に復元する</a:t>
+          <a:bodyPr rtlCol="0" anchor="ctr" wrap="none" lIns="18288" tIns="9144" rIns="18288" bIns="9144"/>
+          <a:lstStyle/>
+          <a:p>
+            <a:pPr algn="ctr">
+              <a:lnSpc>
+                <a:spcPct val="150000"/>
+              </a:lnSpc>
+            </a:pPr>
+            <a:r>
+              <a:rPr lang="ja-JP" altLang="en-US" sz="750">
+                <a:solidFill>
+                  <a:srgbClr val="333333"/>
+                </a:solidFill>
+                <a:latin typeface="Noto Sans JP"/>
+                <a:ea typeface="Noto Sans JP"/>
+              </a:rPr>
+              <a:t>下書き保存 ブラウザのローカルス</a:t>
+            </a:r>
+          </a:p>
+          <a:p>
+            <a:pPr algn="ctr">
+              <a:lnSpc>
+                <a:spcPct val="150000"/>
+              </a:lnSpc>
+            </a:pPr>
+            <a:r>
+              <a:rPr lang="ja-JP" altLang="en-US" sz="750">
+                <a:solidFill>
+                  <a:srgbClr val="333333"/>
+                </a:solidFill>
+                <a:latin typeface="Noto Sans JP"/>
+                <a:ea typeface="Noto Sans JP"/>
+              </a:rPr>
+              <a:t>トレージに一時保存し再読み込み</a:t>
+            </a:r>
+          </a:p>
+          <a:p>
+            <a:pPr algn="ctr">
+              <a:lnSpc>
+                <a:spcPct val="150000"/>
+              </a:lnSpc>
+            </a:pPr>
+            <a:r>
+              <a:rPr lang="ja-JP" altLang="en-US" sz="750">
+                <a:solidFill>
+                  <a:srgbClr val="333333"/>
+                </a:solidFill>
+                <a:latin typeface="Noto Sans JP"/>
+                <a:ea typeface="Noto Sans JP"/>
+              </a:rPr>
+              <a:t>時に復元する</a:t>
             </a:r>
           </a:p>
         </p:txBody>
@@ -293,7 +361,7 @@
           </a:ln>
         </p:spPr>
         <p:txBody>
-          <a:bodyPr rtlCol="0" anchor="ctr" lIns="18288" tIns="9144" rIns="18288" bIns="9144"/>
+          <a:bodyPr rtlCol="0" anchor="ctr" wrap="none" lIns="18288" tIns="9144" rIns="18288" bIns="9144"/>
           <a:lstStyle/>
           <a:p>
             <a:pPr algn="ctr">
@@ -309,7 +377,24 @@
                 <a:latin typeface="Noto Sans JP"/>
                 <a:ea typeface="Noto Sans JP"/>
               </a:rPr>
-              <a:t>送信内容の検証 必須項目の欠落や形式不正を検出したら差し戻す</a:t>
+              <a:t>送信内容の検証 必須項目の欠落や</a:t>
+            </a:r>
+          </a:p>
+          <a:p>
+            <a:pPr algn="ctr">
+              <a:lnSpc>
+                <a:spcPct val="150000"/>
+              </a:lnSpc>
+            </a:pPr>
+            <a:r>
+              <a:rPr lang="ja-JP" altLang="en-US" sz="750">
+                <a:solidFill>
+                  <a:srgbClr val="5A4500"/>
+                </a:solidFill>
+                <a:latin typeface="Noto Sans JP"/>
+                <a:ea typeface="Noto Sans JP"/>
+              </a:rPr>
+              <a:t>形式不正を検出したら差し戻す</a:t>
             </a:r>
           </a:p>
         </p:txBody>
@@ -338,23 +423,40 @@
           </a:ln>
         </p:spPr>
         <p:txBody>
-          <a:bodyPr rtlCol="0" anchor="ctr" lIns="18288" tIns="9144" rIns="18288" bIns="9144"/>
-          <a:lstStyle/>
-          <a:p>
-            <a:pPr algn="ctr">
-              <a:lnSpc>
-                <a:spcPct val="150000"/>
-              </a:lnSpc>
-            </a:pPr>
-            <a:r>
-              <a:rPr lang="ja-JP" altLang="en-US" sz="750">
-                <a:solidFill>
-                  <a:srgbClr val="333333"/>
-                </a:solidFill>
-                <a:latin typeface="Noto Sans JP"/>
-                <a:ea typeface="Noto Sans JP"/>
-              </a:rPr>
-              <a:t>受付 API 正規化とレート制限を通過したリクエストのみ処理する</a:t>
+          <a:bodyPr rtlCol="0" anchor="ctr" wrap="none" lIns="18288" tIns="9144" rIns="18288" bIns="9144"/>
+          <a:lstStyle/>
+          <a:p>
+            <a:pPr algn="ctr">
+              <a:lnSpc>
+                <a:spcPct val="150000"/>
+              </a:lnSpc>
+            </a:pPr>
+            <a:r>
+              <a:rPr lang="ja-JP" altLang="en-US" sz="750">
+                <a:solidFill>
+                  <a:srgbClr val="333333"/>
+                </a:solidFill>
+                <a:latin typeface="Noto Sans JP"/>
+                <a:ea typeface="Noto Sans JP"/>
+              </a:rPr>
+              <a:t>受付 API 正規化とレート制限を</a:t>
+            </a:r>
+          </a:p>
+          <a:p>
+            <a:pPr algn="ctr">
+              <a:lnSpc>
+                <a:spcPct val="150000"/>
+              </a:lnSpc>
+            </a:pPr>
+            <a:r>
+              <a:rPr lang="ja-JP" altLang="en-US" sz="750">
+                <a:solidFill>
+                  <a:srgbClr val="333333"/>
+                </a:solidFill>
+                <a:latin typeface="Noto Sans JP"/>
+                <a:ea typeface="Noto Sans JP"/>
+              </a:rPr>
+              <a:t>通過したリクエストのみ処理する</a:t>
             </a:r>
           </a:p>
         </p:txBody>
@@ -385,7 +487,7 @@
           </a:ln>
         </p:spPr>
         <p:txBody>
-          <a:bodyPr rtlCol="0" anchor="ctr" lIns="18288" tIns="9144" rIns="18288" bIns="9144"/>
+          <a:bodyPr rtlCol="0" anchor="ctr" wrap="none" lIns="18288" tIns="9144" rIns="18288" bIns="9144"/>
           <a:lstStyle/>
           <a:p>
             <a:pPr algn="ctr">
@@ -430,23 +532,40 @@
           </a:ln>
         </p:spPr>
         <p:txBody>
-          <a:bodyPr rtlCol="0" anchor="ctr" lIns="18288" tIns="9144" rIns="18288" bIns="9144"/>
-          <a:lstStyle/>
-          <a:p>
-            <a:pPr algn="ctr">
-              <a:lnSpc>
-                <a:spcPct val="150000"/>
-              </a:lnSpc>
-            </a:pPr>
-            <a:r>
-              <a:rPr lang="ja-JP" altLang="en-US" sz="750">
-                <a:solidFill>
-                  <a:srgbClr val="333333"/>
-                </a:solidFill>
-                <a:latin typeface="Noto Sans JP"/>
-                <a:ea typeface="Noto Sans JP"/>
-              </a:rPr>
-              <a:t>非同期ワーカー 添付ファイルの変換と通知メールの送信を行う</a:t>
+          <a:bodyPr rtlCol="0" anchor="ctr" wrap="none" lIns="18288" tIns="9144" rIns="18288" bIns="9144"/>
+          <a:lstStyle/>
+          <a:p>
+            <a:pPr algn="ctr">
+              <a:lnSpc>
+                <a:spcPct val="150000"/>
+              </a:lnSpc>
+            </a:pPr>
+            <a:r>
+              <a:rPr lang="ja-JP" altLang="en-US" sz="750">
+                <a:solidFill>
+                  <a:srgbClr val="333333"/>
+                </a:solidFill>
+                <a:latin typeface="Noto Sans JP"/>
+                <a:ea typeface="Noto Sans JP"/>
+              </a:rPr>
+              <a:t>非同期ワーカー 添付ファイルの変</a:t>
+            </a:r>
+          </a:p>
+          <a:p>
+            <a:pPr algn="ctr">
+              <a:lnSpc>
+                <a:spcPct val="150000"/>
+              </a:lnSpc>
+            </a:pPr>
+            <a:r>
+              <a:rPr lang="ja-JP" altLang="en-US" sz="750">
+                <a:solidFill>
+                  <a:srgbClr val="333333"/>
+                </a:solidFill>
+                <a:latin typeface="Noto Sans JP"/>
+                <a:ea typeface="Noto Sans JP"/>
+              </a:rPr>
+              <a:t>換と通知メールの送信を行う</a:t>
             </a:r>
           </a:p>
         </p:txBody>

--- a/sample/graph4.pptx
+++ b/sample/graph4.pptx
@@ -439,24 +439,24 @@
                 <a:latin typeface="Noto Sans JP"/>
                 <a:ea typeface="Noto Sans JP"/>
               </a:rPr>
-              <a:t>受付 API 正規化とレート制限を</a:t>
-            </a:r>
-          </a:p>
-          <a:p>
-            <a:pPr algn="ctr">
-              <a:lnSpc>
-                <a:spcPct val="150000"/>
-              </a:lnSpc>
-            </a:pPr>
-            <a:r>
-              <a:rPr lang="ja-JP" altLang="en-US" sz="750">
-                <a:solidFill>
-                  <a:srgbClr val="333333"/>
-                </a:solidFill>
-                <a:latin typeface="Noto Sans JP"/>
-                <a:ea typeface="Noto Sans JP"/>
-              </a:rPr>
-              <a:t>通過したリクエストのみ処理する</a:t>
+              <a:t>受付 API 正規化とレート制限を通</a:t>
+            </a:r>
+          </a:p>
+          <a:p>
+            <a:pPr algn="ctr">
+              <a:lnSpc>
+                <a:spcPct val="150000"/>
+              </a:lnSpc>
+            </a:pPr>
+            <a:r>
+              <a:rPr lang="ja-JP" altLang="en-US" sz="750">
+                <a:solidFill>
+                  <a:srgbClr val="333333"/>
+                </a:solidFill>
+                <a:latin typeface="Noto Sans JP"/>
+                <a:ea typeface="Noto Sans JP"/>
+              </a:rPr>
+              <a:t>過したリクエストのみ処理する</a:t>
             </a:r>
           </a:p>
         </p:txBody>
